--- a/Chemical/Resources/Documentation/Modelica2025-presentation.pptx
+++ b/Chemical/Resources/Documentation/Modelica2025-presentation.pptx
@@ -293,7 +293,7 @@
           <a:p>
             <a:fld id="{23CE0051-D946-4C96-9686-8FA6C8D4FC9B}" type="datetimeFigureOut">
               <a:rPr lang="de-DE" smtClean="0"/>
-              <a:t>06.09.2025</a:t>
+              <a:t>17.12.2025</a:t>
             </a:fld>
             <a:endParaRPr lang="de-DE"/>
           </a:p>
@@ -491,7 +491,7 @@
           <a:p>
             <a:fld id="{23CE0051-D946-4C96-9686-8FA6C8D4FC9B}" type="datetimeFigureOut">
               <a:rPr lang="de-DE" smtClean="0"/>
-              <a:t>06.09.2025</a:t>
+              <a:t>17.12.2025</a:t>
             </a:fld>
             <a:endParaRPr lang="de-DE"/>
           </a:p>
@@ -699,7 +699,7 @@
           <a:p>
             <a:fld id="{23CE0051-D946-4C96-9686-8FA6C8D4FC9B}" type="datetimeFigureOut">
               <a:rPr lang="de-DE" smtClean="0"/>
-              <a:t>06.09.2025</a:t>
+              <a:t>17.12.2025</a:t>
             </a:fld>
             <a:endParaRPr lang="de-DE"/>
           </a:p>
@@ -897,7 +897,7 @@
           <a:p>
             <a:fld id="{23CE0051-D946-4C96-9686-8FA6C8D4FC9B}" type="datetimeFigureOut">
               <a:rPr lang="de-DE" smtClean="0"/>
-              <a:t>06.09.2025</a:t>
+              <a:t>17.12.2025</a:t>
             </a:fld>
             <a:endParaRPr lang="de-DE"/>
           </a:p>
@@ -1172,7 +1172,7 @@
           <a:p>
             <a:fld id="{23CE0051-D946-4C96-9686-8FA6C8D4FC9B}" type="datetimeFigureOut">
               <a:rPr lang="de-DE" smtClean="0"/>
-              <a:t>06.09.2025</a:t>
+              <a:t>17.12.2025</a:t>
             </a:fld>
             <a:endParaRPr lang="de-DE"/>
           </a:p>
@@ -1437,7 +1437,7 @@
           <a:p>
             <a:fld id="{23CE0051-D946-4C96-9686-8FA6C8D4FC9B}" type="datetimeFigureOut">
               <a:rPr lang="de-DE" smtClean="0"/>
-              <a:t>06.09.2025</a:t>
+              <a:t>17.12.2025</a:t>
             </a:fld>
             <a:endParaRPr lang="de-DE"/>
           </a:p>
@@ -1849,7 +1849,7 @@
           <a:p>
             <a:fld id="{23CE0051-D946-4C96-9686-8FA6C8D4FC9B}" type="datetimeFigureOut">
               <a:rPr lang="de-DE" smtClean="0"/>
-              <a:t>06.09.2025</a:t>
+              <a:t>17.12.2025</a:t>
             </a:fld>
             <a:endParaRPr lang="de-DE"/>
           </a:p>
@@ -1990,7 +1990,7 @@
           <a:p>
             <a:fld id="{23CE0051-D946-4C96-9686-8FA6C8D4FC9B}" type="datetimeFigureOut">
               <a:rPr lang="de-DE" smtClean="0"/>
-              <a:t>06.09.2025</a:t>
+              <a:t>17.12.2025</a:t>
             </a:fld>
             <a:endParaRPr lang="de-DE"/>
           </a:p>
@@ -2103,7 +2103,7 @@
           <a:p>
             <a:fld id="{23CE0051-D946-4C96-9686-8FA6C8D4FC9B}" type="datetimeFigureOut">
               <a:rPr lang="de-DE" smtClean="0"/>
-              <a:t>06.09.2025</a:t>
+              <a:t>17.12.2025</a:t>
             </a:fld>
             <a:endParaRPr lang="de-DE"/>
           </a:p>
@@ -2414,7 +2414,7 @@
           <a:p>
             <a:fld id="{23CE0051-D946-4C96-9686-8FA6C8D4FC9B}" type="datetimeFigureOut">
               <a:rPr lang="de-DE" smtClean="0"/>
-              <a:t>06.09.2025</a:t>
+              <a:t>17.12.2025</a:t>
             </a:fld>
             <a:endParaRPr lang="de-DE"/>
           </a:p>
@@ -2702,7 +2702,7 @@
           <a:p>
             <a:fld id="{23CE0051-D946-4C96-9686-8FA6C8D4FC9B}" type="datetimeFigureOut">
               <a:rPr lang="de-DE" smtClean="0"/>
-              <a:t>06.09.2025</a:t>
+              <a:t>17.12.2025</a:t>
             </a:fld>
             <a:endParaRPr lang="de-DE"/>
           </a:p>
@@ -2943,7 +2943,7 @@
           <a:p>
             <a:fld id="{23CE0051-D946-4C96-9686-8FA6C8D4FC9B}" type="datetimeFigureOut">
               <a:rPr lang="de-DE" smtClean="0"/>
-              <a:t>06.09.2025</a:t>
+              <a:t>17.12.2025</a:t>
             </a:fld>
             <a:endParaRPr lang="de-DE"/>
           </a:p>
